--- a/assets/pptx/catalog-494.pptx
+++ b/assets/pptx/catalog-494.pptx
@@ -3273,7 +3273,7 @@
                 <a:ea typeface="Ebrima"/>
                 <a:cs typeface="Ebrima"/>
               </a:rPr>
-              <a:t>በፊትህ መሆን እወዳለሁ (2x)</a:t>
+              <a:t>በፊትህ መሆን እወዳለሁ 2x</a:t>
             </a:r>
           </a:p>
           <a:p>
@@ -3309,7 +3309,7 @@
                 <a:ea typeface="Ebrima"/>
                 <a:cs typeface="Ebrima"/>
               </a:rPr>
-              <a:t>አንተው ነህ ዘመኔን በሙሉ (2x)</a:t>
+              <a:t>አንተው ነህ ዘመኔን በሙሉ 2x</a:t>
             </a:r>
           </a:p>
         </p:txBody>
@@ -3394,7 +3394,7 @@
                 <a:ea typeface="Ebrima"/>
                 <a:cs typeface="Ebrima"/>
               </a:rPr>
-              <a:t>አቤት ማማርህ አቤት ማጌጥህ (የእኤ ጌታ)</a:t>
+              <a:t>አቤት ማማርህ አቤት ማጌጥህ የእኤ ጌታ</a:t>
             </a:r>
           </a:p>
           <a:p>
@@ -3497,7 +3497,7 @@
                 <a:ea typeface="Ebrima"/>
                 <a:cs typeface="Ebrima"/>
               </a:rPr>
-              <a:t>እጽብ ድንቅ (3x) ነህ</a:t>
+              <a:t>እጽብ ድንቅ 3x ነህ</a:t>
             </a:r>
           </a:p>
           <a:p>
@@ -3515,7 +3515,7 @@
                 <a:ea typeface="Ebrima"/>
                 <a:cs typeface="Ebrima"/>
               </a:rPr>
-              <a:t>እጽብ ድንቅ (3x) ነህ</a:t>
+              <a:t>እጽብ ድንቅ 3x ነህ</a:t>
             </a:r>
           </a:p>
           <a:p>
@@ -3533,7 +3533,7 @@
                 <a:ea typeface="Ebrima"/>
                 <a:cs typeface="Ebrima"/>
               </a:rPr>
-              <a:t>እጽብ ድንቅ (3x) ነህ</a:t>
+              <a:t>እጽብ ድንቅ 3x ነህ</a:t>
             </a:r>
           </a:p>
           <a:p>
@@ -3551,7 +3551,7 @@
                 <a:ea typeface="Ebrima"/>
                 <a:cs typeface="Ebrima"/>
               </a:rPr>
-              <a:t>እጽብ ድንቅ (3x) ነህ</a:t>
+              <a:t>እጽብ ድንቅ 3x ነህ</a:t>
             </a:r>
           </a:p>
           <a:p>
@@ -3569,7 +3569,7 @@
                 <a:ea typeface="Ebrima"/>
                 <a:cs typeface="Ebrima"/>
               </a:rPr>
-              <a:t>እጽብ ድንቅ ነህ (4x)</a:t>
+              <a:t>እጽብ ድንቅ ነህ 4x</a:t>
             </a:r>
           </a:p>
         </p:txBody>
@@ -3636,7 +3636,7 @@
                 <a:ea typeface="Ebrima"/>
                 <a:cs typeface="Ebrima"/>
               </a:rPr>
-              <a:t>ፍቅርህ ከወይን ጠጅ ይበልጣል (2x)</a:t>
+              <a:t>ፍቅርህ ከወይን ጠጅ ይበልጣል 2x</a:t>
             </a:r>
           </a:p>
           <a:p>
@@ -3739,7 +3739,7 @@
                 <a:ea typeface="Ebrima"/>
                 <a:cs typeface="Ebrima"/>
               </a:rPr>
-              <a:t>ሥምህ እንደሚፈስ ዘይት ነው (2x)</a:t>
+              <a:t>ሥምህ እንደሚፈስ ዘይት ነው 2x</a:t>
             </a:r>
           </a:p>
           <a:p>
@@ -3927,7 +3927,7 @@
                 <a:ea typeface="Ebrima"/>
                 <a:cs typeface="Ebrima"/>
               </a:rPr>
-              <a:t>አንተ መልካም ነህ (2x)</a:t>
+              <a:t>አንተ መልካም ነህ 2x</a:t>
             </a:r>
           </a:p>
           <a:p>
@@ -3945,7 +3945,7 @@
                 <a:ea typeface="Ebrima"/>
                 <a:cs typeface="Ebrima"/>
               </a:rPr>
-              <a:t>አንተ ፈዋሽ ነህ (2x)</a:t>
+              <a:t>አንተ ፈዋሽ ነህ 2x</a:t>
             </a:r>
           </a:p>
           <a:p>
@@ -3963,7 +3963,7 @@
                 <a:ea typeface="Ebrima"/>
                 <a:cs typeface="Ebrima"/>
               </a:rPr>
-              <a:t>አንተ ጻድቅ ነህ (2x)</a:t>
+              <a:t>አንተ ጻድቅ ነህ 2x</a:t>
             </a:r>
           </a:p>
           <a:p>
@@ -3981,7 +3981,7 @@
                 <a:ea typeface="Ebrima"/>
                 <a:cs typeface="Ebrima"/>
               </a:rPr>
-              <a:t>ተዋጊ ነህ (2x)</a:t>
+              <a:t>ተዋጊ ነህ 2x</a:t>
             </a:r>
           </a:p>
           <a:p>
@@ -3999,7 +3999,7 @@
                 <a:ea typeface="Ebrima"/>
                 <a:cs typeface="Ebrima"/>
               </a:rPr>
-              <a:t>እርሱ መልካም ነው (4x)</a:t>
+              <a:t>እርሱ መልካም ነው 4x</a:t>
             </a:r>
           </a:p>
         </p:txBody>
@@ -4120,7 +4120,7 @@
                 <a:ea typeface="Ebrima"/>
                 <a:cs typeface="Ebrima"/>
               </a:rPr>
-              <a:t>ኮስተር ብሎ መልካም ነህ ብሎሃል (2x)</a:t>
+              <a:t>ኮስተር ብሎ መልካም ነህ ብሎሃል 2x</a:t>
             </a:r>
           </a:p>
           <a:p>
@@ -4156,7 +4156,7 @@
                 <a:ea typeface="Ebrima"/>
                 <a:cs typeface="Ebrima"/>
               </a:rPr>
-              <a:t>ኮስተር ብሎ መልካም ነህ ብሎሃል (2x)</a:t>
+              <a:t>ኮስተር ብሎ መልካም ነህ ብሎሃል 2x</a:t>
             </a:r>
           </a:p>
         </p:txBody>
@@ -4259,7 +4259,7 @@
                 <a:ea typeface="Ebrima"/>
                 <a:cs typeface="Ebrima"/>
               </a:rPr>
-              <a:t>መልሼ አላጥፈውም ቃሌን አላበላሸውም መዝሙሬን (2x)</a:t>
+              <a:t>መልሼ አላጥፈውም ቃሌን አላበላሸውም መዝሙሬን 2x</a:t>
             </a:r>
           </a:p>
         </p:txBody>
@@ -4380,7 +4380,7 @@
                 <a:ea typeface="Ebrima"/>
                 <a:cs typeface="Ebrima"/>
               </a:rPr>
-              <a:t>ኮስተር ብሎ መልካም ነህ ብሎሃል (2x)</a:t>
+              <a:t>ኮስተር ብሎ መልካም ነህ ብሎሃል 2x</a:t>
             </a:r>
           </a:p>
           <a:p>
@@ -4416,7 +4416,7 @@
                 <a:ea typeface="Ebrima"/>
                 <a:cs typeface="Ebrima"/>
               </a:rPr>
-              <a:t>ኮስተር ብሎ መልካም ነህ ብሎሃል (2x)</a:t>
+              <a:t>ኮስተር ብሎ መልካም ነህ ብሎሃል 2x</a:t>
             </a:r>
           </a:p>
         </p:txBody>
@@ -4519,7 +4519,7 @@
                 <a:ea typeface="Ebrima"/>
                 <a:cs typeface="Ebrima"/>
               </a:rPr>
-              <a:t>መልሼ አላጥፈውም ቃሌን አላበላሸውም መዝሙሬን (2x)</a:t>
+              <a:t>መልሼ አላጥፈውም ቃሌን አላበላሸውም መዝሙሬን 2x</a:t>
             </a:r>
           </a:p>
         </p:txBody>
@@ -4604,7 +4604,7 @@
                 <a:ea typeface="Ebrima"/>
                 <a:cs typeface="Ebrima"/>
               </a:rPr>
-              <a:t>በፊትህ መሆን እወዳለሁ (2x)</a:t>
+              <a:t>በፊትህ መሆን እወዳለሁ 2x</a:t>
             </a:r>
           </a:p>
           <a:p>
@@ -4640,7 +4640,7 @@
                 <a:ea typeface="Ebrima"/>
                 <a:cs typeface="Ebrima"/>
               </a:rPr>
-              <a:t>አንተው ነህ ዘመኔን በሙሉ (2x)</a:t>
+              <a:t>አንተው ነህ ዘመኔን በሙሉ 2x</a:t>
             </a:r>
           </a:p>
           <a:p>
@@ -4676,7 +4676,7 @@
                 <a:ea typeface="Ebrima"/>
                 <a:cs typeface="Ebrima"/>
               </a:rPr>
-              <a:t>በፊትህ መሆን እወዳለሁ (2x)</a:t>
+              <a:t>በፊትህ መሆን እወዳለሁ 2x</a:t>
             </a:r>
           </a:p>
           <a:p>
@@ -4712,7 +4712,7 @@
                 <a:ea typeface="Ebrima"/>
                 <a:cs typeface="Ebrima"/>
               </a:rPr>
-              <a:t>አንተ ነህ ዘመኔን በሙሉ (2x)</a:t>
+              <a:t>አንተ ነህ ዘመኔን በሙሉ 2x</a:t>
             </a:r>
           </a:p>
         </p:txBody>
@@ -4797,7 +4797,7 @@
                 <a:ea typeface="Ebrima"/>
                 <a:cs typeface="Ebrima"/>
               </a:rPr>
-              <a:t>አምላክ ሆይ አንተ ክብር ይገባሃል (2x)</a:t>
+              <a:t>አምላክ ሆይ አንተ ክብር ይገባሃል 2x</a:t>
             </a:r>
           </a:p>
           <a:p>
@@ -4833,7 +4833,7 @@
                 <a:ea typeface="Ebrima"/>
                 <a:cs typeface="Ebrima"/>
               </a:rPr>
-              <a:t>አምላክ ሆይ አንተ ክብር ይገባሃል (2x)</a:t>
+              <a:t>አምላክ ሆይ አንተ ክብር ይገባሃል 2x</a:t>
             </a:r>
           </a:p>
           <a:p>
@@ -4887,7 +4887,7 @@
                 <a:ea typeface="Ebrima"/>
                 <a:cs typeface="Ebrima"/>
               </a:rPr>
-              <a:t>ክብር ይገባሃል (4x)</a:t>
+              <a:t>ክብር ይገባሃል 4x</a:t>
             </a:r>
           </a:p>
         </p:txBody>
@@ -4954,7 +4954,7 @@
                 <a:ea typeface="Ebrima"/>
                 <a:cs typeface="Ebrima"/>
               </a:rPr>
-              <a:t>እጹብ ድንቅ (3x) ነህ</a:t>
+              <a:t>እጹብ ድንቅ 3x ነህ</a:t>
             </a:r>
           </a:p>
           <a:p>
@@ -4972,7 +4972,7 @@
                 <a:ea typeface="Ebrima"/>
                 <a:cs typeface="Ebrima"/>
               </a:rPr>
-              <a:t>እጹብ ድንቅ (3x) ነህ</a:t>
+              <a:t>እጹብ ድንቅ 3x ነህ</a:t>
             </a:r>
           </a:p>
           <a:p>
@@ -4990,7 +4990,7 @@
                 <a:ea typeface="Ebrima"/>
                 <a:cs typeface="Ebrima"/>
               </a:rPr>
-              <a:t>እጹብ ድንቅ (3x) ነህ</a:t>
+              <a:t>እጹብ ድንቅ 3x ነህ</a:t>
             </a:r>
           </a:p>
           <a:p>
@@ -5008,7 +5008,7 @@
                 <a:ea typeface="Ebrima"/>
                 <a:cs typeface="Ebrima"/>
               </a:rPr>
-              <a:t>እጹብ ድንቅ (3x) ነህ</a:t>
+              <a:t>እጹብ ድንቅ 3x ነህ</a:t>
             </a:r>
           </a:p>
           <a:p>
@@ -5026,7 +5026,7 @@
                 <a:ea typeface="Ebrima"/>
                 <a:cs typeface="Ebrima"/>
               </a:rPr>
-              <a:t>እጽብ ድንቅ ነህ (4x)</a:t>
+              <a:t>እጽብ ድንቅ ነህ 4x</a:t>
             </a:r>
           </a:p>
         </p:txBody>
